--- a/PRESENTAZIONE PCTO/MODIFICABILI/ESPERIENZA PCTO - CORRETTA.pptx
+++ b/PRESENTAZIONE PCTO/MODIFICABILI/ESPERIENZA PCTO - CORRETTA.pptx
@@ -16971,7 +16971,7 @@
         <p:spPr>
           <a:xfrm>
             <a:off x="5320517" y="1629229"/>
-            <a:ext cx="4505654" cy="4005062"/>
+            <a:ext cx="4505700" cy="4005000"/>
           </a:xfrm>
           <a:prstGeom prst="rect">
             <a:avLst/>
@@ -17004,10 +17004,10 @@
               <a:buNone/>
             </a:pPr>
             <a:r>
-              <a:rPr lang="en-US" sz="1800"/>
-              <a:t>" Riflettendo sul mio futuro, sono determinato a proseguire il mio percorso accademico in Italia, dove credo di poter accedere a opportunità di formazione e crescita più in linea con le mie aspirazioni. </a:t>
+              <a:rPr lang="en-US" sz="1700"/>
+              <a:t>"Riflettendo sul mio futuro, sono determinato a proseguire il mio percorso accademico in Italia, dove credo di poter accedere a opportunità di formazione e crescita più in linea con le mie aspirazioni. </a:t>
             </a:r>
-            <a:endParaRPr sz="1800"/>
+            <a:endParaRPr sz="1700"/>
           </a:p>
           <a:p>
             <a:pPr indent="0" lvl="0" marL="0" rtl="0" algn="just">
@@ -17027,10 +17027,10 @@
               <a:buNone/>
             </a:pPr>
             <a:r>
-              <a:rPr lang="en-US" sz="1800"/>
+              <a:rPr lang="en-US" sz="1700"/>
               <a:t>Nonostante il mio attuale percorso di studi informatico, non escludo la possibilità di orientarmi verso un indirizzo economico, riconoscendo l'importanza di un approccio multidisciplinare in un mondo sempre più interconnesso. </a:t>
             </a:r>
-            <a:endParaRPr sz="3200"/>
+            <a:endParaRPr sz="3100"/>
           </a:p>
           <a:p>
             <a:pPr indent="0" lvl="0" marL="0" rtl="0" algn="just">
@@ -17050,10 +17050,10 @@
               <a:buNone/>
             </a:pPr>
             <a:r>
-              <a:rPr lang="en-US" sz="1800"/>
-              <a:t>Qualunque sarà la mia scelta definitiva, sono certo che questa mi consentirà di acquisire competenze fondamentali per affrontare con successo le sfide future e realizzare i miei obiettivi professionali. “</a:t>
+              <a:rPr lang="en-US" sz="1700"/>
+              <a:t>Qualunque sarà la mia scelta definitiva, sono certo che questa mi consentirà di acquisire competenze fondamentali per affrontare con successo le sfide future e realizzare i miei obiettivi professionali.“</a:t>
             </a:r>
-            <a:endParaRPr sz="1500"/>
+            <a:endParaRPr sz="1400"/>
           </a:p>
         </p:txBody>
       </p:sp>
